--- a/p01/VR-A-Frame-introduction.pptx
+++ b/p01/VR-A-Frame-introduction.pptx
@@ -13,15 +13,16 @@
     <p:sldId id="283" r:id="rId7"/>
     <p:sldId id="271" r:id="rId8"/>
     <p:sldId id="260" r:id="rId9"/>
-    <p:sldId id="265" r:id="rId10"/>
-    <p:sldId id="287" r:id="rId11"/>
-    <p:sldId id="267" r:id="rId12"/>
-    <p:sldId id="273" r:id="rId13"/>
-    <p:sldId id="274" r:id="rId14"/>
-    <p:sldId id="290" r:id="rId15"/>
-    <p:sldId id="293" r:id="rId16"/>
-    <p:sldId id="268" r:id="rId17"/>
-    <p:sldId id="272" r:id="rId18"/>
+    <p:sldId id="294" r:id="rId10"/>
+    <p:sldId id="265" r:id="rId11"/>
+    <p:sldId id="287" r:id="rId12"/>
+    <p:sldId id="267" r:id="rId13"/>
+    <p:sldId id="273" r:id="rId14"/>
+    <p:sldId id="274" r:id="rId15"/>
+    <p:sldId id="290" r:id="rId16"/>
+    <p:sldId id="293" r:id="rId17"/>
+    <p:sldId id="268" r:id="rId18"/>
+    <p:sldId id="272" r:id="rId19"/>
   </p:sldIdLst>
   <p:sldSz cx="12192000" cy="6858000"/>
   <p:notesSz cx="6858000" cy="9144000"/>
@@ -7276,6 +7277,214 @@
                   </a:schemeClr>
                 </a:solidFill>
               </a:rPr>
+              <a:t>Basic HTML</a:t>
+            </a:r>
+          </a:p>
+        </p:txBody>
+      </p:sp>
+      <p:sp>
+        <p:nvSpPr>
+          <p:cNvPr id="3" name="Content Placeholder 2">
+            <a:extLst>
+              <a:ext uri="{FF2B5EF4-FFF2-40B4-BE49-F238E27FC236}">
+                <a16:creationId xmlns:a16="http://schemas.microsoft.com/office/drawing/2014/main" id="{8554C0A5-CBB2-9A5D-2B3F-8C8C01B34A08}"/>
+              </a:ext>
+            </a:extLst>
+          </p:cNvPr>
+          <p:cNvSpPr>
+            <a:spLocks noGrp="1"/>
+          </p:cNvSpPr>
+          <p:nvPr>
+            <p:ph idx="1"/>
+          </p:nvPr>
+        </p:nvSpPr>
+        <p:spPr/>
+        <p:txBody>
+          <a:bodyPr>
+            <a:normAutofit/>
+          </a:bodyPr>
+          <a:lstStyle/>
+          <a:p>
+            <a:pPr marL="0" indent="0">
+              <a:buNone/>
+            </a:pPr>
+            <a:r>
+              <a:rPr lang="en-US" b="1" dirty="0">
+                <a:solidFill>
+                  <a:schemeClr val="accent5">
+                    <a:lumMod val="75000"/>
+                  </a:schemeClr>
+                </a:solidFill>
+              </a:rPr>
+              <a:t>&lt;html&gt;</a:t>
+            </a:r>
+          </a:p>
+          <a:p>
+            <a:pPr marL="0" indent="0">
+              <a:buNone/>
+            </a:pPr>
+            <a:r>
+              <a:rPr lang="en-US" b="1" dirty="0">
+                <a:solidFill>
+                  <a:schemeClr val="accent5">
+                    <a:lumMod val="75000"/>
+                  </a:schemeClr>
+                </a:solidFill>
+              </a:rPr>
+              <a:t>  &lt;head&gt;</a:t>
+            </a:r>
+          </a:p>
+          <a:p>
+            <a:pPr marL="0" indent="0">
+              <a:buNone/>
+            </a:pPr>
+            <a:r>
+              <a:rPr lang="en-US" b="1" dirty="0">
+                <a:solidFill>
+                  <a:schemeClr val="accent5">
+                    <a:lumMod val="75000"/>
+                  </a:schemeClr>
+                </a:solidFill>
+              </a:rPr>
+              <a:t>    </a:t>
+            </a:r>
+          </a:p>
+          <a:p>
+            <a:pPr marL="0" indent="0">
+              <a:buNone/>
+            </a:pPr>
+            <a:r>
+              <a:rPr lang="en-US" b="1" dirty="0">
+                <a:solidFill>
+                  <a:schemeClr val="accent5">
+                    <a:lumMod val="75000"/>
+                  </a:schemeClr>
+                </a:solidFill>
+              </a:rPr>
+              <a:t>  &lt;/head&gt;</a:t>
+            </a:r>
+          </a:p>
+          <a:p>
+            <a:pPr marL="0" indent="0">
+              <a:buNone/>
+            </a:pPr>
+            <a:r>
+              <a:rPr lang="en-US" b="1" dirty="0">
+                <a:solidFill>
+                  <a:schemeClr val="accent5">
+                    <a:lumMod val="75000"/>
+                  </a:schemeClr>
+                </a:solidFill>
+              </a:rPr>
+              <a:t>  &lt;body&gt;</a:t>
+            </a:r>
+          </a:p>
+          <a:p>
+            <a:pPr marL="0" indent="0">
+              <a:buNone/>
+            </a:pPr>
+            <a:r>
+              <a:rPr lang="en-US" b="1" dirty="0">
+                <a:solidFill>
+                  <a:schemeClr val="accent5">
+                    <a:lumMod val="75000"/>
+                  </a:schemeClr>
+                </a:solidFill>
+              </a:rPr>
+              <a:t>    </a:t>
+            </a:r>
+          </a:p>
+          <a:p>
+            <a:pPr marL="0" indent="0">
+              <a:buNone/>
+            </a:pPr>
+            <a:r>
+              <a:rPr lang="en-US" b="1" dirty="0">
+                <a:solidFill>
+                  <a:schemeClr val="accent5">
+                    <a:lumMod val="75000"/>
+                  </a:schemeClr>
+                </a:solidFill>
+              </a:rPr>
+              <a:t>  &lt;/body&gt;</a:t>
+            </a:r>
+          </a:p>
+          <a:p>
+            <a:pPr marL="0" indent="0">
+              <a:buNone/>
+            </a:pPr>
+            <a:r>
+              <a:rPr lang="en-US" b="1" dirty="0">
+                <a:solidFill>
+                  <a:schemeClr val="accent5">
+                    <a:lumMod val="75000"/>
+                  </a:schemeClr>
+                </a:solidFill>
+              </a:rPr>
+              <a:t>&lt;/html&gt;</a:t>
+            </a:r>
+          </a:p>
+        </p:txBody>
+      </p:sp>
+    </p:spTree>
+    <p:extLst>
+      <p:ext uri="{BB962C8B-B14F-4D97-AF65-F5344CB8AC3E}">
+        <p14:creationId xmlns:p14="http://schemas.microsoft.com/office/powerpoint/2010/main" val="225151386"/>
+      </p:ext>
+    </p:extLst>
+  </p:cSld>
+  <p:clrMapOvr>
+    <a:masterClrMapping/>
+  </p:clrMapOvr>
+</p:sld>
+</file>
+
+<file path=ppt/slides/slide11.xml><?xml version="1.0" encoding="utf-8"?>
+<p:sld xmlns:a="http://schemas.openxmlformats.org/drawingml/2006/main" xmlns:r="http://schemas.openxmlformats.org/officeDocument/2006/relationships" xmlns:p="http://schemas.openxmlformats.org/presentationml/2006/main">
+  <p:cSld>
+    <p:spTree>
+      <p:nvGrpSpPr>
+        <p:cNvPr id="1" name=""/>
+        <p:cNvGrpSpPr/>
+        <p:nvPr/>
+      </p:nvGrpSpPr>
+      <p:grpSpPr>
+        <a:xfrm>
+          <a:off x="0" y="0"/>
+          <a:ext cx="0" cy="0"/>
+          <a:chOff x="0" y="0"/>
+          <a:chExt cx="0" cy="0"/>
+        </a:xfrm>
+      </p:grpSpPr>
+      <p:sp>
+        <p:nvSpPr>
+          <p:cNvPr id="2" name="Title 1">
+            <a:extLst>
+              <a:ext uri="{FF2B5EF4-FFF2-40B4-BE49-F238E27FC236}">
+                <a16:creationId xmlns:a16="http://schemas.microsoft.com/office/drawing/2014/main" id="{D27F1D3F-E19A-86B4-8570-4E6383C32976}"/>
+              </a:ext>
+            </a:extLst>
+          </p:cNvPr>
+          <p:cNvSpPr>
+            <a:spLocks noGrp="1"/>
+          </p:cNvSpPr>
+          <p:nvPr>
+            <p:ph type="title"/>
+          </p:nvPr>
+        </p:nvSpPr>
+        <p:spPr/>
+        <p:txBody>
+          <a:bodyPr/>
+          <a:lstStyle/>
+          <a:p>
+            <a:r>
+              <a:rPr lang="en-US" b="1" dirty="0">
+                <a:solidFill>
+                  <a:schemeClr val="accent5">
+                    <a:lumMod val="75000"/>
+                  </a:schemeClr>
+                </a:solidFill>
+              </a:rPr>
               <a:t>index.html </a:t>
             </a:r>
             <a:r>
@@ -8159,7 +8368,7 @@
 </p:sld>
 </file>
 
-<file path=ppt/slides/slide11.xml><?xml version="1.0" encoding="utf-8"?>
+<file path=ppt/slides/slide12.xml><?xml version="1.0" encoding="utf-8"?>
 <p:sld xmlns:a="http://schemas.openxmlformats.org/drawingml/2006/main" xmlns:r="http://schemas.openxmlformats.org/officeDocument/2006/relationships" xmlns:p="http://schemas.openxmlformats.org/presentationml/2006/main">
   <p:cSld>
     <p:spTree>
@@ -8274,6 +8483,24 @@
               <a:rPr lang="en-US" dirty="0"/>
               <a:t>	</a:t>
             </a:r>
+            <a:r>
+              <a:rPr lang="en-US" b="1" dirty="0">
+                <a:solidFill>
+                  <a:srgbClr val="0070C0"/>
+                </a:solidFill>
+              </a:rPr>
+              <a:t> wonder-phil.github.io </a:t>
+            </a:r>
+            <a:endParaRPr lang="en-US" dirty="0"/>
+          </a:p>
+          <a:p>
+            <a:pPr marL="0" indent="0">
+              <a:buNone/>
+            </a:pPr>
+            <a:r>
+              <a:rPr lang="en-US" dirty="0"/>
+              <a:t>	</a:t>
+            </a:r>
           </a:p>
           <a:p>
             <a:pPr marL="0" indent="0">
@@ -8325,7 +8552,7 @@
 </p:sld>
 </file>
 
-<file path=ppt/slides/slide12.xml><?xml version="1.0" encoding="utf-8"?>
+<file path=ppt/slides/slide13.xml><?xml version="1.0" encoding="utf-8"?>
 <p:sld xmlns:a="http://schemas.openxmlformats.org/drawingml/2006/main" xmlns:r="http://schemas.openxmlformats.org/officeDocument/2006/relationships" xmlns:p="http://schemas.openxmlformats.org/presentationml/2006/main">
   <p:cSld>
     <p:spTree>
@@ -9091,7 +9318,7 @@
 </p:sld>
 </file>
 
-<file path=ppt/slides/slide13.xml><?xml version="1.0" encoding="utf-8"?>
+<file path=ppt/slides/slide14.xml><?xml version="1.0" encoding="utf-8"?>
 <p:sld xmlns:a="http://schemas.openxmlformats.org/drawingml/2006/main" xmlns:r="http://schemas.openxmlformats.org/officeDocument/2006/relationships" xmlns:p="http://schemas.openxmlformats.org/presentationml/2006/main">
   <p:cSld>
     <p:spTree>
@@ -9406,7 +9633,7 @@
 </p:sld>
 </file>
 
-<file path=ppt/slides/slide14.xml><?xml version="1.0" encoding="utf-8"?>
+<file path=ppt/slides/slide15.xml><?xml version="1.0" encoding="utf-8"?>
 <p:sld xmlns:a="http://schemas.openxmlformats.org/drawingml/2006/main" xmlns:r="http://schemas.openxmlformats.org/officeDocument/2006/relationships" xmlns:p="http://schemas.openxmlformats.org/presentationml/2006/main">
   <p:cSld>
     <p:spTree>
@@ -9568,7 +9795,7 @@
 </p:sld>
 </file>
 
-<file path=ppt/slides/slide15.xml><?xml version="1.0" encoding="utf-8"?>
+<file path=ppt/slides/slide16.xml><?xml version="1.0" encoding="utf-8"?>
 <p:sld xmlns:a="http://schemas.openxmlformats.org/drawingml/2006/main" xmlns:r="http://schemas.openxmlformats.org/officeDocument/2006/relationships" xmlns:p="http://schemas.openxmlformats.org/presentationml/2006/main">
   <p:cSld>
     <p:spTree>
@@ -9627,7 +9854,7 @@
 </p:sld>
 </file>
 
-<file path=ppt/slides/slide16.xml><?xml version="1.0" encoding="utf-8"?>
+<file path=ppt/slides/slide17.xml><?xml version="1.0" encoding="utf-8"?>
 <p:sld xmlns:a="http://schemas.openxmlformats.org/drawingml/2006/main" xmlns:r="http://schemas.openxmlformats.org/officeDocument/2006/relationships" xmlns:p="http://schemas.openxmlformats.org/presentationml/2006/main">
   <p:cSld>
     <p:spTree>
@@ -9855,7 +10082,7 @@
 </p:sld>
 </file>
 
-<file path=ppt/slides/slide17.xml><?xml version="1.0" encoding="utf-8"?>
+<file path=ppt/slides/slide18.xml><?xml version="1.0" encoding="utf-8"?>
 <p:sld xmlns:a="http://schemas.openxmlformats.org/drawingml/2006/main" xmlns:r="http://schemas.openxmlformats.org/officeDocument/2006/relationships" xmlns:p="http://schemas.openxmlformats.org/presentationml/2006/main">
   <p:cSld>
     <p:spTree>
@@ -10425,7 +10652,7 @@
         <p:spPr/>
         <p:txBody>
           <a:bodyPr vert="horz" lIns="91440" tIns="45720" rIns="91440" bIns="45720" rtlCol="0" anchor="t">
-            <a:normAutofit fontScale="85000" lnSpcReduction="20000"/>
+            <a:normAutofit/>
           </a:bodyPr>
           <a:lstStyle/>
           <a:p>
@@ -10484,44 +10711,18 @@
               <a:buNone/>
             </a:pPr>
             <a:r>
+              <a:rPr lang="en-US" dirty="0" err="1">
+                <a:ea typeface="Calibri" panose="020F0502020204030204"/>
+                <a:cs typeface="Calibri" panose="020F0502020204030204"/>
+              </a:rPr>
+              <a:t>Github</a:t>
+            </a:r>
+            <a:r>
               <a:rPr lang="en-US" dirty="0">
                 <a:ea typeface="Calibri" panose="020F0502020204030204"/>
                 <a:cs typeface="Calibri" panose="020F0502020204030204"/>
               </a:rPr>
-              <a:t>Glitch</a:t>
-            </a:r>
-          </a:p>
-          <a:p>
-            <a:pPr marL="0" indent="0">
-              <a:buNone/>
-            </a:pPr>
-            <a:r>
-              <a:rPr lang="en-US" dirty="0">
-                <a:ea typeface="Calibri" panose="020F0502020204030204"/>
-                <a:cs typeface="Calibri" panose="020F0502020204030204"/>
-              </a:rPr>
-              <a:t>	What is Glitch.com?</a:t>
-            </a:r>
-          </a:p>
-          <a:p>
-            <a:pPr marL="0" indent="0">
-              <a:buNone/>
-            </a:pPr>
-            <a:endParaRPr lang="en-US" dirty="0">
-              <a:ea typeface="Calibri" panose="020F0502020204030204"/>
-              <a:cs typeface="Calibri" panose="020F0502020204030204"/>
-            </a:endParaRPr>
-          </a:p>
-          <a:p>
-            <a:pPr marL="0" indent="0">
-              <a:buNone/>
-            </a:pPr>
-            <a:r>
-              <a:rPr lang="en-US" dirty="0">
-                <a:ea typeface="Calibri" panose="020F0502020204030204"/>
-                <a:cs typeface="Calibri" panose="020F0502020204030204"/>
-              </a:rPr>
-              <a:t>Get an account in Glitch.com</a:t>
+              <a:t> pages</a:t>
             </a:r>
           </a:p>
           <a:p>
@@ -10997,6 +11198,36 @@
             </a:pPr>
             <a:r>
               <a:rPr lang="en-US" dirty="0"/>
+              <a:t>	Goto </a:t>
+            </a:r>
+            <a:r>
+              <a:rPr lang="en-US" b="1" dirty="0">
+                <a:solidFill>
+                  <a:srgbClr val="0070C0"/>
+                </a:solidFill>
+              </a:rPr>
+              <a:t>wonder-phil.github.io </a:t>
+            </a:r>
+            <a:r>
+              <a:rPr lang="en-US" dirty="0"/>
+              <a:t>or YOUR_USER. github.io  </a:t>
+            </a:r>
+          </a:p>
+          <a:p>
+            <a:pPr marL="0" indent="0">
+              <a:buNone/>
+            </a:pPr>
+            <a:r>
+              <a:rPr lang="en-US" dirty="0"/>
+              <a:t>	</a:t>
+            </a:r>
+          </a:p>
+          <a:p>
+            <a:pPr marL="0" indent="0">
+              <a:buNone/>
+            </a:pPr>
+            <a:r>
+              <a:rPr lang="en-US" dirty="0"/>
               <a:t>	Clone </a:t>
             </a:r>
             <a:r>
@@ -11067,15 +11298,28 @@
           <a:p>
             <a:r>
               <a:rPr lang="en-US" dirty="0">
-                <a:solidFill>
-                  <a:srgbClr val="0070C0"/>
-                </a:solidFill>
                 <a:latin typeface="Calibri"/>
                 <a:ea typeface="Calibri"/>
                 <a:cs typeface="Calibri"/>
               </a:rPr>
-              <a:t>Overview</a:t>
-            </a:r>
+              <a:t>Overview: </a:t>
+            </a:r>
+            <a:r>
+              <a:rPr lang="en-US" b="1" dirty="0">
+                <a:solidFill>
+                  <a:srgbClr val="0070C0"/>
+                </a:solidFill>
+              </a:rPr>
+              <a:t>wonder-phil.github.io </a:t>
+            </a:r>
+            <a:endParaRPr lang="en-US" b="1" dirty="0">
+              <a:solidFill>
+                <a:srgbClr val="0070C0"/>
+              </a:solidFill>
+              <a:latin typeface="Calibri"/>
+              <a:ea typeface="Calibri"/>
+              <a:cs typeface="Calibri"/>
+            </a:endParaRPr>
           </a:p>
         </p:txBody>
       </p:sp>
@@ -11254,7 +11498,7 @@
         </p:nvSpPr>
         <p:spPr>
           <a:xfrm>
-            <a:off x="4612102" y="1803151"/>
+            <a:off x="4533642" y="2075312"/>
             <a:ext cx="930443" cy="1026694"/>
           </a:xfrm>
           <a:prstGeom prst="halfFrame">
@@ -11304,7 +11548,7 @@
         </p:nvSpPr>
         <p:spPr>
           <a:xfrm>
-            <a:off x="4463934" y="1649121"/>
+            <a:off x="4533642" y="2071467"/>
             <a:ext cx="6556991" cy="4527842"/>
           </a:xfrm>
           <a:prstGeom prst="rect">
@@ -11351,7 +11595,7 @@
         </p:nvSpPr>
         <p:spPr>
           <a:xfrm>
-            <a:off x="6648652" y="1100160"/>
+            <a:off x="6611748" y="1480779"/>
             <a:ext cx="1702069" cy="523220"/>
           </a:xfrm>
           <a:prstGeom prst="rect">
@@ -11464,7 +11708,7 @@
           <p:cNvPr id="2" name="Title 1">
             <a:extLst>
               <a:ext uri="{FF2B5EF4-FFF2-40B4-BE49-F238E27FC236}">
-                <a16:creationId xmlns:a16="http://schemas.microsoft.com/office/drawing/2014/main" id="{D27F1D3F-E19A-86B4-8570-4E6383C32976}"/>
+                <a16:creationId xmlns:a16="http://schemas.microsoft.com/office/drawing/2014/main" id="{F467B405-F00D-3006-4120-5269BB0CACD6}"/>
               </a:ext>
             </a:extLst>
           </p:cNvPr>
@@ -11481,14 +11725,8 @@
           <a:lstStyle/>
           <a:p>
             <a:r>
-              <a:rPr lang="en-US" b="1" dirty="0">
-                <a:solidFill>
-                  <a:schemeClr val="accent5">
-                    <a:lumMod val="75000"/>
-                  </a:schemeClr>
-                </a:solidFill>
-              </a:rPr>
-              <a:t>Basic HTML</a:t>
+              <a:rPr lang="en-US" dirty="0"/>
+              <a:t>Laptop view</a:t>
             </a:r>
           </a:p>
         </p:txBody>
@@ -11498,7 +11736,7 @@
           <p:cNvPr id="3" name="Content Placeholder 2">
             <a:extLst>
               <a:ext uri="{FF2B5EF4-FFF2-40B4-BE49-F238E27FC236}">
-                <a16:creationId xmlns:a16="http://schemas.microsoft.com/office/drawing/2014/main" id="{8554C0A5-CBB2-9A5D-2B3F-8C8C01B34A08}"/>
+                <a16:creationId xmlns:a16="http://schemas.microsoft.com/office/drawing/2014/main" id="{5F735EF0-64B4-EE94-342F-9439BB7F95EA}"/>
               </a:ext>
             </a:extLst>
           </p:cNvPr>
@@ -11512,7 +11750,7 @@
         <p:spPr/>
         <p:txBody>
           <a:bodyPr>
-            <a:normAutofit/>
+            <a:normAutofit lnSpcReduction="10000"/>
           </a:bodyPr>
           <a:lstStyle/>
           <a:p>
@@ -11520,15 +11758,52 @@
               <a:buNone/>
             </a:pPr>
             <a:r>
+              <a:rPr lang="en-US" dirty="0"/>
+              <a:t>git clone </a:t>
+            </a:r>
+            <a:r>
+              <a:rPr lang="en-US" dirty="0">
+                <a:hlinkClick r:id="rId2"/>
+              </a:rPr>
+              <a:t>https://github.com/wonder-phil/wonder-phil.github.io.git</a:t>
+            </a:r>
+            <a:r>
+              <a:rPr lang="en-US" dirty="0"/>
+              <a:t> </a:t>
+            </a:r>
+          </a:p>
+          <a:p>
+            <a:pPr marL="0" indent="0">
+              <a:buNone/>
+            </a:pPr>
+            <a:endParaRPr lang="en-US" dirty="0"/>
+          </a:p>
+          <a:p>
+            <a:pPr marL="0" indent="0">
+              <a:buNone/>
+            </a:pPr>
+            <a:r>
+              <a:rPr lang="en-US" dirty="0"/>
+              <a:t>cd </a:t>
+            </a:r>
+            <a:r>
               <a:rPr lang="en-US" b="1" dirty="0">
                 <a:solidFill>
-                  <a:schemeClr val="accent5">
-                    <a:lumMod val="75000"/>
-                  </a:schemeClr>
+                  <a:srgbClr val="0070C0"/>
                 </a:solidFill>
               </a:rPr>
-              <a:t>&lt;html&gt;</a:t>
-            </a:r>
+              <a:t>wonder-phil.github.io</a:t>
+            </a:r>
+          </a:p>
+          <a:p>
+            <a:pPr marL="0" indent="0">
+              <a:buNone/>
+            </a:pPr>
+            <a:endParaRPr lang="en-US" b="1" dirty="0">
+              <a:solidFill>
+                <a:srgbClr val="0070C0"/>
+              </a:solidFill>
+            </a:endParaRPr>
           </a:p>
           <a:p>
             <a:pPr marL="0" indent="0">
@@ -11537,28 +11812,61 @@
             <a:r>
               <a:rPr lang="en-US" b="1" dirty="0">
                 <a:solidFill>
-                  <a:schemeClr val="accent5">
-                    <a:lumMod val="75000"/>
-                  </a:schemeClr>
+                  <a:srgbClr val="0070C0"/>
                 </a:solidFill>
               </a:rPr>
-              <a:t>  &lt;head&gt;</a:t>
-            </a:r>
-          </a:p>
-          <a:p>
-            <a:pPr marL="0" indent="0">
-              <a:buNone/>
-            </a:pPr>
+              <a:t>Term1&gt; python –m </a:t>
+            </a:r>
+            <a:r>
+              <a:rPr lang="en-US" b="1" dirty="0" err="1">
+                <a:solidFill>
+                  <a:srgbClr val="0070C0"/>
+                </a:solidFill>
+              </a:rPr>
+              <a:t>http.server</a:t>
+            </a:r>
+            <a:endParaRPr lang="en-US" b="1" dirty="0">
+              <a:solidFill>
+                <a:srgbClr val="0070C0"/>
+              </a:solidFill>
+            </a:endParaRPr>
+          </a:p>
+          <a:p>
+            <a:pPr marL="0" indent="0">
+              <a:buNone/>
+            </a:pPr>
+            <a:endParaRPr lang="en-US" b="1" dirty="0">
+              <a:solidFill>
+                <a:srgbClr val="0070C0"/>
+              </a:solidFill>
+            </a:endParaRPr>
+          </a:p>
+          <a:p>
+            <a:pPr marL="0" indent="0">
+              <a:buNone/>
+            </a:pPr>
+            <a:r>
+              <a:rPr lang="en-US" dirty="0"/>
+              <a:t>In a browser go to </a:t>
+            </a:r>
             <a:r>
               <a:rPr lang="en-US" b="1" dirty="0">
                 <a:solidFill>
-                  <a:schemeClr val="accent5">
-                    <a:lumMod val="75000"/>
-                  </a:schemeClr>
+                  <a:srgbClr val="0070C0"/>
                 </a:solidFill>
               </a:rPr>
-              <a:t>    </a:t>
-            </a:r>
+              <a:t>http://localhost:8000/</a:t>
+            </a:r>
+          </a:p>
+          <a:p>
+            <a:pPr marL="0" indent="0">
+              <a:buNone/>
+            </a:pPr>
+            <a:endParaRPr lang="en-US" b="1" dirty="0">
+              <a:solidFill>
+                <a:srgbClr val="0070C0"/>
+              </a:solidFill>
+            </a:endParaRPr>
           </a:p>
           <a:p>
             <a:pPr marL="0" indent="0">
@@ -11567,80 +11875,24 @@
             <a:r>
               <a:rPr lang="en-US" b="1" dirty="0">
                 <a:solidFill>
-                  <a:schemeClr val="accent5">
-                    <a:lumMod val="75000"/>
-                  </a:schemeClr>
+                  <a:srgbClr val="0070C0"/>
                 </a:solidFill>
               </a:rPr>
-              <a:t>  &lt;/head&gt;</a:t>
-            </a:r>
-          </a:p>
-          <a:p>
-            <a:pPr marL="0" indent="0">
-              <a:buNone/>
-            </a:pPr>
-            <a:r>
-              <a:rPr lang="en-US" b="1" dirty="0">
-                <a:solidFill>
-                  <a:schemeClr val="accent5">
-                    <a:lumMod val="75000"/>
-                  </a:schemeClr>
-                </a:solidFill>
-              </a:rPr>
-              <a:t>  &lt;body&gt;</a:t>
-            </a:r>
-          </a:p>
-          <a:p>
-            <a:pPr marL="0" indent="0">
-              <a:buNone/>
-            </a:pPr>
-            <a:r>
-              <a:rPr lang="en-US" b="1" dirty="0">
-                <a:solidFill>
-                  <a:schemeClr val="accent5">
-                    <a:lumMod val="75000"/>
-                  </a:schemeClr>
-                </a:solidFill>
-              </a:rPr>
-              <a:t>    </a:t>
-            </a:r>
-          </a:p>
-          <a:p>
-            <a:pPr marL="0" indent="0">
-              <a:buNone/>
-            </a:pPr>
-            <a:r>
-              <a:rPr lang="en-US" b="1" dirty="0">
-                <a:solidFill>
-                  <a:schemeClr val="accent5">
-                    <a:lumMod val="75000"/>
-                  </a:schemeClr>
-                </a:solidFill>
-              </a:rPr>
-              <a:t>  &lt;/body&gt;</a:t>
-            </a:r>
-          </a:p>
-          <a:p>
-            <a:pPr marL="0" indent="0">
-              <a:buNone/>
-            </a:pPr>
-            <a:r>
-              <a:rPr lang="en-US" b="1" dirty="0">
-                <a:solidFill>
-                  <a:schemeClr val="accent5">
-                    <a:lumMod val="75000"/>
-                  </a:schemeClr>
-                </a:solidFill>
-              </a:rPr>
-              <a:t>&lt;/html&gt;</a:t>
-            </a:r>
+              <a:t>Term2&gt; code .</a:t>
+            </a:r>
+          </a:p>
+          <a:p>
+            <a:pPr marL="0" indent="0">
+              <a:buNone/>
+            </a:pPr>
+            <a:endParaRPr lang="en-US" dirty="0"/>
           </a:p>
         </p:txBody>
       </p:sp>
     </p:spTree>
     <p:extLst>
       <p:ext uri="{BB962C8B-B14F-4D97-AF65-F5344CB8AC3E}">
-        <p14:creationId xmlns:p14="http://schemas.microsoft.com/office/powerpoint/2010/main" val="225151386"/>
+        <p14:creationId xmlns:p14="http://schemas.microsoft.com/office/powerpoint/2010/main" val="1300459307"/>
       </p:ext>
     </p:extLst>
   </p:cSld>
